--- a/public/course-materials/pptx/Module-08-Acheter-son-premier-USDT-sur-Terex.pptx
+++ b/public/course-materials/pptx/Module-08-Acheter-son-premier-USDT-sur-Terex.pptx
@@ -4773,7 +4773,7 @@
     <p:bg>
       <p:bgPr>
         <a:solidFill>
-          <a:srgbClr val="0F1419"/>
+          <a:srgbClr val="0F1214"/>
         </a:solidFill>
       </p:bgPr>
     </p:bg>
@@ -4806,7 +4806,7 @@
             <a:avLst/>
           </a:prstGeom>
           <a:solidFill>
-            <a:srgbClr val="84CC16">
+            <a:srgbClr val="3B968F">
               <a:alpha val="8000"/>
             </a:srgbClr>
           </a:solidFill>
@@ -4828,7 +4828,7 @@
             <a:avLst/>
           </a:prstGeom>
           <a:solidFill>
-            <a:srgbClr val="84CC16">
+            <a:srgbClr val="3B968F">
               <a:alpha val="5000"/>
             </a:srgbClr>
           </a:solidFill>
@@ -4850,7 +4850,7 @@
             <a:avLst/>
           </a:prstGeom>
           <a:solidFill>
-            <a:srgbClr val="84CC16"/>
+            <a:srgbClr val="3B968F"/>
           </a:solidFill>
           <a:ln/>
         </p:spPr>
@@ -4906,7 +4906,7 @@
             <a:r>
               <a:rPr lang="en-US" sz="1300" b="1" spc="400" kern="0" dirty="0">
                 <a:solidFill>
-                  <a:srgbClr val="84CC16"/>
+                  <a:srgbClr val="3B968F"/>
                 </a:solidFill>
                 <a:latin typeface="Calibri" pitchFamily="34" charset="0"/>
                 <a:ea typeface="Calibri" pitchFamily="34" charset="-122"/>
@@ -4972,7 +4972,7 @@
             <a:avLst/>
           </a:prstGeom>
           <a:solidFill>
-            <a:srgbClr val="84CC16"/>
+            <a:srgbClr val="3B968F"/>
           </a:solidFill>
           <a:ln/>
         </p:spPr>
@@ -5004,7 +5004,7 @@
             <a:r>
               <a:rPr lang="en-US" sz="1100" spc="300" kern="0" dirty="0">
                 <a:solidFill>
-                  <a:srgbClr val="64748B"/>
+                  <a:srgbClr val="5B6672"/>
                 </a:solidFill>
                 <a:latin typeface="Calibri" pitchFamily="34" charset="0"/>
                 <a:ea typeface="Calibri" pitchFamily="34" charset="-122"/>
@@ -5043,7 +5043,7 @@
             <a:r>
               <a:rPr lang="en-US" sz="1100" dirty="0">
                 <a:solidFill>
-                  <a:srgbClr val="94A3B8"/>
+                  <a:srgbClr val="8994A0"/>
                 </a:solidFill>
                 <a:latin typeface="Calibri" pitchFamily="34" charset="0"/>
                 <a:ea typeface="Calibri" pitchFamily="34" charset="-122"/>
@@ -5069,7 +5069,7 @@
     <p:bg>
       <p:bgPr>
         <a:solidFill>
-          <a:srgbClr val="1A2332"/>
+          <a:srgbClr val="1A2026"/>
         </a:solidFill>
       </p:bgPr>
     </p:bg>
@@ -5138,7 +5138,7 @@
             <a:r>
               <a:rPr lang="en-US" sz="1200" b="1" spc="300" kern="0" dirty="0">
                 <a:solidFill>
-                  <a:srgbClr val="F59E0B"/>
+                  <a:srgbClr val="5BC1B8"/>
                 </a:solidFill>
                 <a:latin typeface="Calibri" pitchFamily="34" charset="0"/>
                 <a:ea typeface="Calibri" pitchFamily="34" charset="-122"/>
@@ -5206,7 +5206,7 @@
             </a:avLst>
           </a:prstGeom>
           <a:solidFill>
-            <a:srgbClr val="0F1419"/>
+            <a:srgbClr val="0F1214"/>
           </a:solidFill>
           <a:ln/>
         </p:spPr>
@@ -5228,7 +5228,7 @@
             </a:avLst>
           </a:prstGeom>
           <a:solidFill>
-            <a:srgbClr val="84CC16"/>
+            <a:srgbClr val="3B968F"/>
           </a:solidFill>
           <a:ln/>
         </p:spPr>
@@ -5242,7 +5242,7 @@
             <a:r>
               <a:rPr lang="en-US" sz="1500" b="1" dirty="0">
                 <a:solidFill>
-                  <a:srgbClr val="0F1419"/>
+                  <a:srgbClr val="0F1214"/>
                 </a:solidFill>
                 <a:latin typeface="Calibri" pitchFamily="34" charset="0"/>
                 <a:ea typeface="Calibri" pitchFamily="34" charset="-122"/>
@@ -5310,7 +5310,7 @@
             </a:avLst>
           </a:prstGeom>
           <a:solidFill>
-            <a:srgbClr val="0F1419"/>
+            <a:srgbClr val="0F1214"/>
           </a:solidFill>
           <a:ln/>
         </p:spPr>
@@ -5332,7 +5332,7 @@
             </a:avLst>
           </a:prstGeom>
           <a:solidFill>
-            <a:srgbClr val="84CC16"/>
+            <a:srgbClr val="3B968F"/>
           </a:solidFill>
           <a:ln/>
         </p:spPr>
@@ -5346,7 +5346,7 @@
             <a:r>
               <a:rPr lang="en-US" sz="1500" b="1" dirty="0">
                 <a:solidFill>
-                  <a:srgbClr val="0F1419"/>
+                  <a:srgbClr val="0F1214"/>
                 </a:solidFill>
                 <a:latin typeface="Calibri" pitchFamily="34" charset="0"/>
                 <a:ea typeface="Calibri" pitchFamily="34" charset="-122"/>
@@ -5414,7 +5414,7 @@
             </a:avLst>
           </a:prstGeom>
           <a:solidFill>
-            <a:srgbClr val="0F1419"/>
+            <a:srgbClr val="0F1214"/>
           </a:solidFill>
           <a:ln/>
         </p:spPr>
@@ -5436,7 +5436,7 @@
             </a:avLst>
           </a:prstGeom>
           <a:solidFill>
-            <a:srgbClr val="84CC16"/>
+            <a:srgbClr val="3B968F"/>
           </a:solidFill>
           <a:ln/>
         </p:spPr>
@@ -5450,7 +5450,7 @@
             <a:r>
               <a:rPr lang="en-US" sz="1500" b="1" dirty="0">
                 <a:solidFill>
-                  <a:srgbClr val="0F1419"/>
+                  <a:srgbClr val="0F1214"/>
                 </a:solidFill>
                 <a:latin typeface="Calibri" pitchFamily="34" charset="0"/>
                 <a:ea typeface="Calibri" pitchFamily="34" charset="-122"/>
@@ -5518,7 +5518,7 @@
             </a:avLst>
           </a:prstGeom>
           <a:solidFill>
-            <a:srgbClr val="0F1419"/>
+            <a:srgbClr val="0F1214"/>
           </a:solidFill>
           <a:ln/>
         </p:spPr>
@@ -5540,7 +5540,7 @@
             </a:avLst>
           </a:prstGeom>
           <a:solidFill>
-            <a:srgbClr val="84CC16"/>
+            <a:srgbClr val="3B968F"/>
           </a:solidFill>
           <a:ln/>
         </p:spPr>
@@ -5554,7 +5554,7 @@
             <a:r>
               <a:rPr lang="en-US" sz="1500" b="1" dirty="0">
                 <a:solidFill>
-                  <a:srgbClr val="0F1419"/>
+                  <a:srgbClr val="0F1214"/>
                 </a:solidFill>
                 <a:latin typeface="Calibri" pitchFamily="34" charset="0"/>
                 <a:ea typeface="Calibri" pitchFamily="34" charset="-122"/>
@@ -5622,7 +5622,7 @@
             </a:avLst>
           </a:prstGeom>
           <a:solidFill>
-            <a:srgbClr val="0F1419"/>
+            <a:srgbClr val="0F1214"/>
           </a:solidFill>
           <a:ln/>
         </p:spPr>
@@ -5644,7 +5644,7 @@
             </a:avLst>
           </a:prstGeom>
           <a:solidFill>
-            <a:srgbClr val="84CC16"/>
+            <a:srgbClr val="3B968F"/>
           </a:solidFill>
           <a:ln/>
         </p:spPr>
@@ -5658,7 +5658,7 @@
             <a:r>
               <a:rPr lang="en-US" sz="1500" b="1" dirty="0">
                 <a:solidFill>
-                  <a:srgbClr val="0F1419"/>
+                  <a:srgbClr val="0F1214"/>
                 </a:solidFill>
                 <a:latin typeface="Calibri" pitchFamily="34" charset="0"/>
                 <a:ea typeface="Calibri" pitchFamily="34" charset="-122"/>
@@ -5723,7 +5723,7 @@
     <p:bg>
       <p:bgPr>
         <a:solidFill>
-          <a:srgbClr val="0D2137"/>
+          <a:srgbClr val="12181D"/>
         </a:solidFill>
       </p:bgPr>
     </p:bg>
@@ -5804,7 +5804,7 @@
             <a:avLst/>
           </a:prstGeom>
           <a:solidFill>
-            <a:srgbClr val="84CC16">
+            <a:srgbClr val="3B968F">
               <a:alpha val="6000"/>
             </a:srgbClr>
           </a:solidFill>
@@ -5826,7 +5826,7 @@
             <a:avLst/>
           </a:prstGeom>
           <a:solidFill>
-            <a:srgbClr val="84CC16"/>
+            <a:srgbClr val="3B968F"/>
           </a:solidFill>
           <a:ln/>
         </p:spPr>
@@ -5858,7 +5858,7 @@
             <a:r>
               <a:rPr lang="en-US" sz="1200" b="1" spc="200" kern="0" dirty="0">
                 <a:solidFill>
-                  <a:srgbClr val="84CC16"/>
+                  <a:srgbClr val="3B968F"/>
                 </a:solidFill>
                 <a:latin typeface="Calibri" pitchFamily="34" charset="0"/>
                 <a:ea typeface="Calibri" pitchFamily="34" charset="-122"/>
@@ -5936,7 +5936,7 @@
             <a:r>
               <a:rPr lang="en-US" sz="1100" dirty="0">
                 <a:solidFill>
-                  <a:srgbClr val="64748B"/>
+                  <a:srgbClr val="5B6672"/>
                 </a:solidFill>
                 <a:latin typeface="Calibri" pitchFamily="34" charset="0"/>
                 <a:ea typeface="Calibri" pitchFamily="34" charset="-122"/>
@@ -5962,7 +5962,7 @@
     <p:bg>
       <p:bgPr>
         <a:solidFill>
-          <a:srgbClr val="0F1419"/>
+          <a:srgbClr val="0F1214"/>
         </a:solidFill>
       </p:bgPr>
     </p:bg>
@@ -5995,7 +5995,7 @@
             <a:avLst/>
           </a:prstGeom>
           <a:solidFill>
-            <a:srgbClr val="84CC16">
+            <a:srgbClr val="3B968F">
               <a:alpha val="12000"/>
             </a:srgbClr>
           </a:solidFill>
@@ -6096,7 +6096,7 @@
             <a:r>
               <a:rPr lang="en-US" sz="900" dirty="0">
                 <a:solidFill>
-                  <a:srgbClr val="64748B"/>
+                  <a:srgbClr val="5B6672"/>
                 </a:solidFill>
                 <a:latin typeface="Calibri" pitchFamily="34" charset="0"/>
                 <a:ea typeface="Calibri" pitchFamily="34" charset="-122"/>
@@ -6122,7 +6122,7 @@
     <p:bg>
       <p:bgPr>
         <a:solidFill>
-          <a:srgbClr val="0F1419"/>
+          <a:srgbClr val="0F1214"/>
         </a:solidFill>
       </p:bgPr>
     </p:bg>
@@ -6167,7 +6167,7 @@
             <a:r>
               <a:rPr lang="en-US" sz="2000" b="1" dirty="0">
                 <a:solidFill>
-                  <a:srgbClr val="84CC16"/>
+                  <a:srgbClr val="3B968F"/>
                 </a:solidFill>
                 <a:latin typeface="Calibri" pitchFamily="34" charset="0"/>
                 <a:ea typeface="Calibri" pitchFamily="34" charset="-122"/>
@@ -6281,7 +6281,7 @@
             </a:avLst>
           </a:prstGeom>
           <a:solidFill>
-            <a:srgbClr val="1A2332"/>
+            <a:srgbClr val="1A2026"/>
           </a:solidFill>
           <a:ln/>
         </p:spPr>
@@ -6366,7 +6366,7 @@
             </a:avLst>
           </a:prstGeom>
           <a:solidFill>
-            <a:srgbClr val="1A2332"/>
+            <a:srgbClr val="1A2026"/>
           </a:solidFill>
           <a:ln/>
         </p:spPr>
@@ -6448,7 +6448,7 @@
     <p:bg>
       <p:bgPr>
         <a:solidFill>
-          <a:srgbClr val="0F1419"/>
+          <a:srgbClr val="0F1214"/>
         </a:solidFill>
       </p:bgPr>
     </p:bg>
@@ -6481,7 +6481,7 @@
             <a:avLst/>
           </a:prstGeom>
           <a:solidFill>
-            <a:srgbClr val="84CC16">
+            <a:srgbClr val="3B968F">
               <a:alpha val="12000"/>
             </a:srgbClr>
           </a:solidFill>
@@ -6539,7 +6539,7 @@
             <a:r>
               <a:rPr lang="en-US" sz="2000" b="1" dirty="0">
                 <a:solidFill>
-                  <a:srgbClr val="84CC16"/>
+                  <a:srgbClr val="3B968F"/>
                 </a:solidFill>
                 <a:latin typeface="Calibri" pitchFamily="34" charset="0"/>
                 <a:ea typeface="Calibri" pitchFamily="34" charset="-122"/>
@@ -6747,7 +6747,7 @@
             <a:r>
               <a:rPr lang="en-US" sz="900" dirty="0">
                 <a:solidFill>
-                  <a:srgbClr val="64748B"/>
+                  <a:srgbClr val="5B6672"/>
                 </a:solidFill>
                 <a:latin typeface="Calibri" pitchFamily="34" charset="0"/>
                 <a:ea typeface="Calibri" pitchFamily="34" charset="-122"/>
@@ -6773,7 +6773,7 @@
     <p:bg>
       <p:bgPr>
         <a:solidFill>
-          <a:srgbClr val="0F1419"/>
+          <a:srgbClr val="0F1214"/>
         </a:solidFill>
       </p:bgPr>
     </p:bg>
@@ -6806,7 +6806,7 @@
             <a:avLst/>
           </a:prstGeom>
           <a:solidFill>
-            <a:srgbClr val="84CC16">
+            <a:srgbClr val="3B968F">
               <a:alpha val="12000"/>
             </a:srgbClr>
           </a:solidFill>
@@ -6864,7 +6864,7 @@
             <a:r>
               <a:rPr lang="en-US" sz="2000" b="1" dirty="0">
                 <a:solidFill>
-                  <a:srgbClr val="84CC16"/>
+                  <a:srgbClr val="3B968F"/>
                 </a:solidFill>
                 <a:latin typeface="Calibri" pitchFamily="34" charset="0"/>
                 <a:ea typeface="Calibri" pitchFamily="34" charset="-122"/>
@@ -7030,7 +7030,7 @@
             <a:r>
               <a:rPr lang="en-US" sz="900" dirty="0">
                 <a:solidFill>
-                  <a:srgbClr val="64748B"/>
+                  <a:srgbClr val="5B6672"/>
                 </a:solidFill>
                 <a:latin typeface="Calibri" pitchFamily="34" charset="0"/>
                 <a:ea typeface="Calibri" pitchFamily="34" charset="-122"/>
@@ -7056,7 +7056,7 @@
     <p:bg>
       <p:bgPr>
         <a:solidFill>
-          <a:srgbClr val="1A2332"/>
+          <a:srgbClr val="1A2026"/>
         </a:solidFill>
       </p:bgPr>
     </p:bg>
@@ -7125,7 +7125,7 @@
             <a:r>
               <a:rPr lang="en-US" sz="1200" b="1" spc="300" kern="0" dirty="0">
                 <a:solidFill>
-                  <a:srgbClr val="F59E0B"/>
+                  <a:srgbClr val="5BC1B8"/>
                 </a:solidFill>
                 <a:latin typeface="Calibri" pitchFamily="34" charset="0"/>
                 <a:ea typeface="Calibri" pitchFamily="34" charset="-122"/>
@@ -7193,7 +7193,7 @@
             </a:avLst>
           </a:prstGeom>
           <a:solidFill>
-            <a:srgbClr val="0F1419"/>
+            <a:srgbClr val="0F1214"/>
           </a:solidFill>
           <a:ln/>
         </p:spPr>
@@ -7215,7 +7215,7 @@
             </a:avLst>
           </a:prstGeom>
           <a:solidFill>
-            <a:srgbClr val="84CC16"/>
+            <a:srgbClr val="3B968F"/>
           </a:solidFill>
           <a:ln/>
         </p:spPr>
@@ -7229,7 +7229,7 @@
             <a:r>
               <a:rPr lang="en-US" sz="1500" b="1" dirty="0">
                 <a:solidFill>
-                  <a:srgbClr val="0F1419"/>
+                  <a:srgbClr val="0F1214"/>
                 </a:solidFill>
                 <a:latin typeface="Calibri" pitchFamily="34" charset="0"/>
                 <a:ea typeface="Calibri" pitchFamily="34" charset="-122"/>
@@ -7297,7 +7297,7 @@
             </a:avLst>
           </a:prstGeom>
           <a:solidFill>
-            <a:srgbClr val="0F1419"/>
+            <a:srgbClr val="0F1214"/>
           </a:solidFill>
           <a:ln/>
         </p:spPr>
@@ -7319,7 +7319,7 @@
             </a:avLst>
           </a:prstGeom>
           <a:solidFill>
-            <a:srgbClr val="84CC16"/>
+            <a:srgbClr val="3B968F"/>
           </a:solidFill>
           <a:ln/>
         </p:spPr>
@@ -7333,7 +7333,7 @@
             <a:r>
               <a:rPr lang="en-US" sz="1500" b="1" dirty="0">
                 <a:solidFill>
-                  <a:srgbClr val="0F1419"/>
+                  <a:srgbClr val="0F1214"/>
                 </a:solidFill>
                 <a:latin typeface="Calibri" pitchFamily="34" charset="0"/>
                 <a:ea typeface="Calibri" pitchFamily="34" charset="-122"/>
@@ -7401,7 +7401,7 @@
             </a:avLst>
           </a:prstGeom>
           <a:solidFill>
-            <a:srgbClr val="0F1419"/>
+            <a:srgbClr val="0F1214"/>
           </a:solidFill>
           <a:ln/>
         </p:spPr>
@@ -7423,7 +7423,7 @@
             </a:avLst>
           </a:prstGeom>
           <a:solidFill>
-            <a:srgbClr val="84CC16"/>
+            <a:srgbClr val="3B968F"/>
           </a:solidFill>
           <a:ln/>
         </p:spPr>
@@ -7437,7 +7437,7 @@
             <a:r>
               <a:rPr lang="en-US" sz="1500" b="1" dirty="0">
                 <a:solidFill>
-                  <a:srgbClr val="0F1419"/>
+                  <a:srgbClr val="0F1214"/>
                 </a:solidFill>
                 <a:latin typeface="Calibri" pitchFamily="34" charset="0"/>
                 <a:ea typeface="Calibri" pitchFamily="34" charset="-122"/>
@@ -7505,7 +7505,7 @@
             </a:avLst>
           </a:prstGeom>
           <a:solidFill>
-            <a:srgbClr val="0F1419"/>
+            <a:srgbClr val="0F1214"/>
           </a:solidFill>
           <a:ln/>
         </p:spPr>
@@ -7527,7 +7527,7 @@
             </a:avLst>
           </a:prstGeom>
           <a:solidFill>
-            <a:srgbClr val="84CC16"/>
+            <a:srgbClr val="3B968F"/>
           </a:solidFill>
           <a:ln/>
         </p:spPr>
@@ -7541,7 +7541,7 @@
             <a:r>
               <a:rPr lang="en-US" sz="1500" b="1" dirty="0">
                 <a:solidFill>
-                  <a:srgbClr val="0F1419"/>
+                  <a:srgbClr val="0F1214"/>
                 </a:solidFill>
                 <a:latin typeface="Calibri" pitchFamily="34" charset="0"/>
                 <a:ea typeface="Calibri" pitchFamily="34" charset="-122"/>
@@ -7609,7 +7609,7 @@
             </a:avLst>
           </a:prstGeom>
           <a:solidFill>
-            <a:srgbClr val="0F1419"/>
+            <a:srgbClr val="0F1214"/>
           </a:solidFill>
           <a:ln/>
         </p:spPr>
@@ -7631,7 +7631,7 @@
             </a:avLst>
           </a:prstGeom>
           <a:solidFill>
-            <a:srgbClr val="84CC16"/>
+            <a:srgbClr val="3B968F"/>
           </a:solidFill>
           <a:ln/>
         </p:spPr>
@@ -7645,7 +7645,7 @@
             <a:r>
               <a:rPr lang="en-US" sz="1500" b="1" dirty="0">
                 <a:solidFill>
-                  <a:srgbClr val="0F1419"/>
+                  <a:srgbClr val="0F1214"/>
                 </a:solidFill>
                 <a:latin typeface="Calibri" pitchFamily="34" charset="0"/>
                 <a:ea typeface="Calibri" pitchFamily="34" charset="-122"/>
@@ -7710,7 +7710,7 @@
     <p:bg>
       <p:bgPr>
         <a:solidFill>
-          <a:srgbClr val="0D2137"/>
+          <a:srgbClr val="12181D"/>
         </a:solidFill>
       </p:bgPr>
     </p:bg>
@@ -7791,7 +7791,7 @@
             <a:avLst/>
           </a:prstGeom>
           <a:solidFill>
-            <a:srgbClr val="84CC16">
+            <a:srgbClr val="3B968F">
               <a:alpha val="6000"/>
             </a:srgbClr>
           </a:solidFill>
@@ -7813,7 +7813,7 @@
             <a:avLst/>
           </a:prstGeom>
           <a:solidFill>
-            <a:srgbClr val="84CC16"/>
+            <a:srgbClr val="3B968F"/>
           </a:solidFill>
           <a:ln/>
         </p:spPr>
@@ -7845,7 +7845,7 @@
             <a:r>
               <a:rPr lang="en-US" sz="1200" b="1" spc="200" kern="0" dirty="0">
                 <a:solidFill>
-                  <a:srgbClr val="84CC16"/>
+                  <a:srgbClr val="3B968F"/>
                 </a:solidFill>
                 <a:latin typeface="Calibri" pitchFamily="34" charset="0"/>
                 <a:ea typeface="Calibri" pitchFamily="34" charset="-122"/>
@@ -7923,7 +7923,7 @@
             <a:r>
               <a:rPr lang="en-US" sz="1100" dirty="0">
                 <a:solidFill>
-                  <a:srgbClr val="64748B"/>
+                  <a:srgbClr val="5B6672"/>
                 </a:solidFill>
                 <a:latin typeface="Calibri" pitchFamily="34" charset="0"/>
                 <a:ea typeface="Calibri" pitchFamily="34" charset="-122"/>
@@ -7949,7 +7949,7 @@
     <p:bg>
       <p:bgPr>
         <a:solidFill>
-          <a:srgbClr val="0F1419"/>
+          <a:srgbClr val="0F1214"/>
         </a:solidFill>
       </p:bgPr>
     </p:bg>
@@ -7982,7 +7982,7 @@
             <a:avLst/>
           </a:prstGeom>
           <a:solidFill>
-            <a:srgbClr val="84CC16">
+            <a:srgbClr val="3B968F">
               <a:alpha val="12000"/>
             </a:srgbClr>
           </a:solidFill>
@@ -8104,7 +8104,7 @@
             <a:r>
               <a:rPr lang="en-US" sz="900" dirty="0">
                 <a:solidFill>
-                  <a:srgbClr val="64748B"/>
+                  <a:srgbClr val="5B6672"/>
                 </a:solidFill>
                 <a:latin typeface="Calibri" pitchFamily="34" charset="0"/>
                 <a:ea typeface="Calibri" pitchFamily="34" charset="-122"/>
@@ -8130,7 +8130,7 @@
     <p:bg>
       <p:bgPr>
         <a:solidFill>
-          <a:srgbClr val="0F1419"/>
+          <a:srgbClr val="0F1214"/>
         </a:solidFill>
       </p:bgPr>
     </p:bg>
@@ -8175,7 +8175,7 @@
             <a:r>
               <a:rPr lang="en-US" sz="2000" b="1" dirty="0">
                 <a:solidFill>
-                  <a:srgbClr val="84CC16"/>
+                  <a:srgbClr val="3B968F"/>
                 </a:solidFill>
                 <a:latin typeface="Calibri" pitchFamily="34" charset="0"/>
                 <a:ea typeface="Calibri" pitchFamily="34" charset="-122"/>
@@ -8310,7 +8310,7 @@
             </a:avLst>
           </a:prstGeom>
           <a:solidFill>
-            <a:srgbClr val="1A2332"/>
+            <a:srgbClr val="1A2026"/>
           </a:solidFill>
           <a:ln/>
         </p:spPr>
@@ -8395,7 +8395,7 @@
             </a:avLst>
           </a:prstGeom>
           <a:solidFill>
-            <a:srgbClr val="1A2332"/>
+            <a:srgbClr val="1A2026"/>
           </a:solidFill>
           <a:ln/>
         </p:spPr>
@@ -8480,7 +8480,7 @@
             </a:avLst>
           </a:prstGeom>
           <a:solidFill>
-            <a:srgbClr val="1A2332"/>
+            <a:srgbClr val="1A2026"/>
           </a:solidFill>
           <a:ln/>
         </p:spPr>
@@ -8562,7 +8562,7 @@
     <p:bg>
       <p:bgPr>
         <a:solidFill>
-          <a:srgbClr val="0F1419"/>
+          <a:srgbClr val="0F1214"/>
         </a:solidFill>
       </p:bgPr>
     </p:bg>
@@ -8607,7 +8607,7 @@
             <a:r>
               <a:rPr lang="en-US" sz="1200" b="1" spc="300" kern="0" dirty="0">
                 <a:solidFill>
-                  <a:srgbClr val="84CC16"/>
+                  <a:srgbClr val="3B968F"/>
                 </a:solidFill>
                 <a:latin typeface="Calibri" pitchFamily="34" charset="0"/>
                 <a:ea typeface="Calibri" pitchFamily="34" charset="-122"/>
@@ -8675,7 +8675,7 @@
             </a:avLst>
           </a:prstGeom>
           <a:solidFill>
-            <a:srgbClr val="1A2332"/>
+            <a:srgbClr val="1A2026"/>
           </a:solidFill>
           <a:ln/>
         </p:spPr>
@@ -8707,7 +8707,7 @@
             <a:r>
               <a:rPr lang="en-US" sz="1300" b="1" dirty="0">
                 <a:solidFill>
-                  <a:srgbClr val="84CC16"/>
+                  <a:srgbClr val="3B968F"/>
                 </a:solidFill>
                 <a:latin typeface="Calibri" pitchFamily="34" charset="0"/>
                 <a:ea typeface="Calibri" pitchFamily="34" charset="-122"/>
@@ -8799,7 +8799,7 @@
             </a:avLst>
           </a:prstGeom>
           <a:solidFill>
-            <a:srgbClr val="1A2332"/>
+            <a:srgbClr val="1A2026"/>
           </a:solidFill>
           <a:ln/>
         </p:spPr>
@@ -8831,7 +8831,7 @@
             <a:r>
               <a:rPr lang="en-US" sz="1300" b="1" dirty="0">
                 <a:solidFill>
-                  <a:srgbClr val="84CC16"/>
+                  <a:srgbClr val="3B968F"/>
                 </a:solidFill>
                 <a:latin typeface="Calibri" pitchFamily="34" charset="0"/>
                 <a:ea typeface="Calibri" pitchFamily="34" charset="-122"/>
@@ -8923,7 +8923,7 @@
             </a:avLst>
           </a:prstGeom>
           <a:solidFill>
-            <a:srgbClr val="1A2332"/>
+            <a:srgbClr val="1A2026"/>
           </a:solidFill>
           <a:ln/>
         </p:spPr>
@@ -8955,7 +8955,7 @@
             <a:r>
               <a:rPr lang="en-US" sz="1300" b="1" dirty="0">
                 <a:solidFill>
-                  <a:srgbClr val="84CC16"/>
+                  <a:srgbClr val="3B968F"/>
                 </a:solidFill>
                 <a:latin typeface="Calibri" pitchFamily="34" charset="0"/>
                 <a:ea typeface="Calibri" pitchFamily="34" charset="-122"/>
@@ -9047,7 +9047,7 @@
             </a:avLst>
           </a:prstGeom>
           <a:solidFill>
-            <a:srgbClr val="1A2332"/>
+            <a:srgbClr val="1A2026"/>
           </a:solidFill>
           <a:ln/>
         </p:spPr>
@@ -9079,7 +9079,7 @@
             <a:r>
               <a:rPr lang="en-US" sz="1300" b="1" dirty="0">
                 <a:solidFill>
-                  <a:srgbClr val="84CC16"/>
+                  <a:srgbClr val="3B968F"/>
                 </a:solidFill>
                 <a:latin typeface="Calibri" pitchFamily="34" charset="0"/>
                 <a:ea typeface="Calibri" pitchFamily="34" charset="-122"/>
@@ -9171,7 +9171,7 @@
             </a:avLst>
           </a:prstGeom>
           <a:solidFill>
-            <a:srgbClr val="1A2332"/>
+            <a:srgbClr val="1A2026"/>
           </a:solidFill>
           <a:ln/>
         </p:spPr>
@@ -9203,7 +9203,7 @@
             <a:r>
               <a:rPr lang="en-US" sz="1300" b="1" dirty="0">
                 <a:solidFill>
-                  <a:srgbClr val="84CC16"/>
+                  <a:srgbClr val="3B968F"/>
                 </a:solidFill>
                 <a:latin typeface="Calibri" pitchFamily="34" charset="0"/>
                 <a:ea typeface="Calibri" pitchFamily="34" charset="-122"/>
@@ -9292,7 +9292,7 @@
     <p:bg>
       <p:bgPr>
         <a:solidFill>
-          <a:srgbClr val="0F1419"/>
+          <a:srgbClr val="0F1214"/>
         </a:solidFill>
       </p:bgPr>
     </p:bg>
@@ -9325,7 +9325,7 @@
             <a:avLst/>
           </a:prstGeom>
           <a:solidFill>
-            <a:srgbClr val="84CC16">
+            <a:srgbClr val="3B968F">
               <a:alpha val="12000"/>
             </a:srgbClr>
           </a:solidFill>
@@ -9383,7 +9383,7 @@
             <a:r>
               <a:rPr lang="en-US" sz="2000" b="1" dirty="0">
                 <a:solidFill>
-                  <a:srgbClr val="84CC16"/>
+                  <a:srgbClr val="3B968F"/>
                 </a:solidFill>
                 <a:latin typeface="Calibri" pitchFamily="34" charset="0"/>
                 <a:ea typeface="Calibri" pitchFamily="34" charset="-122"/>
@@ -9465,7 +9465,7 @@
             <a:r>
               <a:rPr lang="en-US" sz="900" dirty="0">
                 <a:solidFill>
-                  <a:srgbClr val="64748B"/>
+                  <a:srgbClr val="5B6672"/>
                 </a:solidFill>
                 <a:latin typeface="Calibri" pitchFamily="34" charset="0"/>
                 <a:ea typeface="Calibri" pitchFamily="34" charset="-122"/>
@@ -9491,7 +9491,7 @@
     <p:bg>
       <p:bgPr>
         <a:solidFill>
-          <a:srgbClr val="0F1419"/>
+          <a:srgbClr val="0F1214"/>
         </a:solidFill>
       </p:bgPr>
     </p:bg>
@@ -9524,7 +9524,7 @@
             <a:avLst/>
           </a:prstGeom>
           <a:solidFill>
-            <a:srgbClr val="84CC16">
+            <a:srgbClr val="3B968F">
               <a:alpha val="12000"/>
             </a:srgbClr>
           </a:solidFill>
@@ -9582,7 +9582,7 @@
             <a:r>
               <a:rPr lang="en-US" sz="2000" b="1" dirty="0">
                 <a:solidFill>
-                  <a:srgbClr val="84CC16"/>
+                  <a:srgbClr val="3B968F"/>
                 </a:solidFill>
                 <a:latin typeface="Calibri" pitchFamily="34" charset="0"/>
                 <a:ea typeface="Calibri" pitchFamily="34" charset="-122"/>
@@ -9706,7 +9706,7 @@
             <a:r>
               <a:rPr lang="en-US" sz="900" dirty="0">
                 <a:solidFill>
-                  <a:srgbClr val="64748B"/>
+                  <a:srgbClr val="5B6672"/>
                 </a:solidFill>
                 <a:latin typeface="Calibri" pitchFamily="34" charset="0"/>
                 <a:ea typeface="Calibri" pitchFamily="34" charset="-122"/>
@@ -9732,7 +9732,7 @@
     <p:bg>
       <p:bgPr>
         <a:solidFill>
-          <a:srgbClr val="0F1419"/>
+          <a:srgbClr val="0F1214"/>
         </a:solidFill>
       </p:bgPr>
     </p:bg>
@@ -9777,7 +9777,7 @@
             <a:r>
               <a:rPr lang="en-US" sz="2000" b="1" dirty="0">
                 <a:solidFill>
-                  <a:srgbClr val="84CC16"/>
+                  <a:srgbClr val="3B968F"/>
                 </a:solidFill>
                 <a:latin typeface="Calibri" pitchFamily="34" charset="0"/>
                 <a:ea typeface="Calibri" pitchFamily="34" charset="-122"/>
@@ -9912,7 +9912,7 @@
             </a:avLst>
           </a:prstGeom>
           <a:solidFill>
-            <a:srgbClr val="1A2332"/>
+            <a:srgbClr val="1A2026"/>
           </a:solidFill>
           <a:ln/>
         </p:spPr>
@@ -9997,7 +9997,7 @@
             </a:avLst>
           </a:prstGeom>
           <a:solidFill>
-            <a:srgbClr val="1A2332"/>
+            <a:srgbClr val="1A2026"/>
           </a:solidFill>
           <a:ln/>
         </p:spPr>
@@ -10082,7 +10082,7 @@
             </a:avLst>
           </a:prstGeom>
           <a:solidFill>
-            <a:srgbClr val="1A2332"/>
+            <a:srgbClr val="1A2026"/>
           </a:solidFill>
           <a:ln/>
         </p:spPr>
@@ -10164,7 +10164,7 @@
     <p:bg>
       <p:bgPr>
         <a:solidFill>
-          <a:srgbClr val="0F1419"/>
+          <a:srgbClr val="0F1214"/>
         </a:solidFill>
       </p:bgPr>
     </p:bg>
@@ -10197,7 +10197,7 @@
             <a:avLst/>
           </a:prstGeom>
           <a:solidFill>
-            <a:srgbClr val="84CC16">
+            <a:srgbClr val="3B968F">
               <a:alpha val="12000"/>
             </a:srgbClr>
           </a:solidFill>
@@ -10255,7 +10255,7 @@
             <a:r>
               <a:rPr lang="en-US" sz="2000" b="1" dirty="0">
                 <a:solidFill>
-                  <a:srgbClr val="84CC16"/>
+                  <a:srgbClr val="3B968F"/>
                 </a:solidFill>
                 <a:latin typeface="Calibri" pitchFamily="34" charset="0"/>
                 <a:ea typeface="Calibri" pitchFamily="34" charset="-122"/>
@@ -10337,7 +10337,7 @@
             <a:r>
               <a:rPr lang="en-US" sz="900" dirty="0">
                 <a:solidFill>
-                  <a:srgbClr val="64748B"/>
+                  <a:srgbClr val="5B6672"/>
                 </a:solidFill>
                 <a:latin typeface="Calibri" pitchFamily="34" charset="0"/>
                 <a:ea typeface="Calibri" pitchFamily="34" charset="-122"/>
@@ -10363,7 +10363,7 @@
     <p:bg>
       <p:bgPr>
         <a:solidFill>
-          <a:srgbClr val="0F1419"/>
+          <a:srgbClr val="0F1214"/>
         </a:solidFill>
       </p:bgPr>
     </p:bg>
@@ -10396,7 +10396,7 @@
             <a:avLst/>
           </a:prstGeom>
           <a:solidFill>
-            <a:srgbClr val="84CC16">
+            <a:srgbClr val="3B968F">
               <a:alpha val="12000"/>
             </a:srgbClr>
           </a:solidFill>
@@ -10454,7 +10454,7 @@
             <a:r>
               <a:rPr lang="en-US" sz="2000" b="1" dirty="0">
                 <a:solidFill>
-                  <a:srgbClr val="84CC16"/>
+                  <a:srgbClr val="3B968F"/>
                 </a:solidFill>
                 <a:latin typeface="Calibri" pitchFamily="34" charset="0"/>
                 <a:ea typeface="Calibri" pitchFamily="34" charset="-122"/>
@@ -10599,7 +10599,7 @@
             <a:r>
               <a:rPr lang="en-US" sz="900" dirty="0">
                 <a:solidFill>
-                  <a:srgbClr val="64748B"/>
+                  <a:srgbClr val="5B6672"/>
                 </a:solidFill>
                 <a:latin typeface="Calibri" pitchFamily="34" charset="0"/>
                 <a:ea typeface="Calibri" pitchFamily="34" charset="-122"/>
@@ -10625,7 +10625,7 @@
     <p:bg>
       <p:bgPr>
         <a:solidFill>
-          <a:srgbClr val="1A2332"/>
+          <a:srgbClr val="1A2026"/>
         </a:solidFill>
       </p:bgPr>
     </p:bg>
@@ -10694,7 +10694,7 @@
             <a:r>
               <a:rPr lang="en-US" sz="1200" b="1" spc="300" kern="0" dirty="0">
                 <a:solidFill>
-                  <a:srgbClr val="F59E0B"/>
+                  <a:srgbClr val="5BC1B8"/>
                 </a:solidFill>
                 <a:latin typeface="Calibri" pitchFamily="34" charset="0"/>
                 <a:ea typeface="Calibri" pitchFamily="34" charset="-122"/>
@@ -10762,7 +10762,7 @@
             </a:avLst>
           </a:prstGeom>
           <a:solidFill>
-            <a:srgbClr val="0F1419"/>
+            <a:srgbClr val="0F1214"/>
           </a:solidFill>
           <a:ln/>
         </p:spPr>
@@ -10784,7 +10784,7 @@
             </a:avLst>
           </a:prstGeom>
           <a:solidFill>
-            <a:srgbClr val="84CC16"/>
+            <a:srgbClr val="3B968F"/>
           </a:solidFill>
           <a:ln/>
         </p:spPr>
@@ -10798,7 +10798,7 @@
             <a:r>
               <a:rPr lang="en-US" sz="1500" b="1" dirty="0">
                 <a:solidFill>
-                  <a:srgbClr val="0F1419"/>
+                  <a:srgbClr val="0F1214"/>
                 </a:solidFill>
                 <a:latin typeface="Calibri" pitchFamily="34" charset="0"/>
                 <a:ea typeface="Calibri" pitchFamily="34" charset="-122"/>
@@ -10866,7 +10866,7 @@
             </a:avLst>
           </a:prstGeom>
           <a:solidFill>
-            <a:srgbClr val="0F1419"/>
+            <a:srgbClr val="0F1214"/>
           </a:solidFill>
           <a:ln/>
         </p:spPr>
@@ -10888,7 +10888,7 @@
             </a:avLst>
           </a:prstGeom>
           <a:solidFill>
-            <a:srgbClr val="84CC16"/>
+            <a:srgbClr val="3B968F"/>
           </a:solidFill>
           <a:ln/>
         </p:spPr>
@@ -10902,7 +10902,7 @@
             <a:r>
               <a:rPr lang="en-US" sz="1500" b="1" dirty="0">
                 <a:solidFill>
-                  <a:srgbClr val="0F1419"/>
+                  <a:srgbClr val="0F1214"/>
                 </a:solidFill>
                 <a:latin typeface="Calibri" pitchFamily="34" charset="0"/>
                 <a:ea typeface="Calibri" pitchFamily="34" charset="-122"/>
@@ -10970,7 +10970,7 @@
             </a:avLst>
           </a:prstGeom>
           <a:solidFill>
-            <a:srgbClr val="0F1419"/>
+            <a:srgbClr val="0F1214"/>
           </a:solidFill>
           <a:ln/>
         </p:spPr>
@@ -10992,7 +10992,7 @@
             </a:avLst>
           </a:prstGeom>
           <a:solidFill>
-            <a:srgbClr val="84CC16"/>
+            <a:srgbClr val="3B968F"/>
           </a:solidFill>
           <a:ln/>
         </p:spPr>
@@ -11006,7 +11006,7 @@
             <a:r>
               <a:rPr lang="en-US" sz="1500" b="1" dirty="0">
                 <a:solidFill>
-                  <a:srgbClr val="0F1419"/>
+                  <a:srgbClr val="0F1214"/>
                 </a:solidFill>
                 <a:latin typeface="Calibri" pitchFamily="34" charset="0"/>
                 <a:ea typeface="Calibri" pitchFamily="34" charset="-122"/>
@@ -11074,7 +11074,7 @@
             </a:avLst>
           </a:prstGeom>
           <a:solidFill>
-            <a:srgbClr val="0F1419"/>
+            <a:srgbClr val="0F1214"/>
           </a:solidFill>
           <a:ln/>
         </p:spPr>
@@ -11096,7 +11096,7 @@
             </a:avLst>
           </a:prstGeom>
           <a:solidFill>
-            <a:srgbClr val="84CC16"/>
+            <a:srgbClr val="3B968F"/>
           </a:solidFill>
           <a:ln/>
         </p:spPr>
@@ -11110,7 +11110,7 @@
             <a:r>
               <a:rPr lang="en-US" sz="1500" b="1" dirty="0">
                 <a:solidFill>
-                  <a:srgbClr val="0F1419"/>
+                  <a:srgbClr val="0F1214"/>
                 </a:solidFill>
                 <a:latin typeface="Calibri" pitchFamily="34" charset="0"/>
                 <a:ea typeface="Calibri" pitchFamily="34" charset="-122"/>
@@ -11175,7 +11175,7 @@
     <p:bg>
       <p:bgPr>
         <a:solidFill>
-          <a:srgbClr val="0D2137"/>
+          <a:srgbClr val="12181D"/>
         </a:solidFill>
       </p:bgPr>
     </p:bg>
@@ -11256,7 +11256,7 @@
             <a:avLst/>
           </a:prstGeom>
           <a:solidFill>
-            <a:srgbClr val="84CC16">
+            <a:srgbClr val="3B968F">
               <a:alpha val="6000"/>
             </a:srgbClr>
           </a:solidFill>
@@ -11278,7 +11278,7 @@
             <a:avLst/>
           </a:prstGeom>
           <a:solidFill>
-            <a:srgbClr val="84CC16"/>
+            <a:srgbClr val="3B968F"/>
           </a:solidFill>
           <a:ln/>
         </p:spPr>
@@ -11310,7 +11310,7 @@
             <a:r>
               <a:rPr lang="en-US" sz="1200" b="1" spc="200" kern="0" dirty="0">
                 <a:solidFill>
-                  <a:srgbClr val="84CC16"/>
+                  <a:srgbClr val="3B968F"/>
                 </a:solidFill>
                 <a:latin typeface="Calibri" pitchFamily="34" charset="0"/>
                 <a:ea typeface="Calibri" pitchFamily="34" charset="-122"/>
@@ -11388,7 +11388,7 @@
             <a:r>
               <a:rPr lang="en-US" sz="1100" dirty="0">
                 <a:solidFill>
-                  <a:srgbClr val="64748B"/>
+                  <a:srgbClr val="5B6672"/>
                 </a:solidFill>
                 <a:latin typeface="Calibri" pitchFamily="34" charset="0"/>
                 <a:ea typeface="Calibri" pitchFamily="34" charset="-122"/>
@@ -11414,7 +11414,7 @@
     <p:bg>
       <p:bgPr>
         <a:solidFill>
-          <a:srgbClr val="0F1419"/>
+          <a:srgbClr val="0F1214"/>
         </a:solidFill>
       </p:bgPr>
     </p:bg>
@@ -11447,7 +11447,7 @@
             <a:avLst/>
           </a:prstGeom>
           <a:solidFill>
-            <a:srgbClr val="84CC16">
+            <a:srgbClr val="3B968F">
               <a:alpha val="12000"/>
             </a:srgbClr>
           </a:solidFill>
@@ -11548,7 +11548,7 @@
             <a:r>
               <a:rPr lang="en-US" sz="900" dirty="0">
                 <a:solidFill>
-                  <a:srgbClr val="64748B"/>
+                  <a:srgbClr val="5B6672"/>
                 </a:solidFill>
                 <a:latin typeface="Calibri" pitchFamily="34" charset="0"/>
                 <a:ea typeface="Calibri" pitchFamily="34" charset="-122"/>
@@ -11574,7 +11574,7 @@
     <p:bg>
       <p:bgPr>
         <a:solidFill>
-          <a:srgbClr val="0F1419"/>
+          <a:srgbClr val="0F1214"/>
         </a:solidFill>
       </p:bgPr>
     </p:bg>
@@ -11619,7 +11619,7 @@
             <a:r>
               <a:rPr lang="en-US" sz="2000" b="1" dirty="0">
                 <a:solidFill>
-                  <a:srgbClr val="84CC16"/>
+                  <a:srgbClr val="3B968F"/>
                 </a:solidFill>
                 <a:latin typeface="Calibri" pitchFamily="34" charset="0"/>
                 <a:ea typeface="Calibri" pitchFamily="34" charset="-122"/>
@@ -11712,7 +11712,7 @@
             </a:avLst>
           </a:prstGeom>
           <a:solidFill>
-            <a:srgbClr val="1A2332"/>
+            <a:srgbClr val="1A2026"/>
           </a:solidFill>
           <a:ln/>
         </p:spPr>
@@ -11797,7 +11797,7 @@
             </a:avLst>
           </a:prstGeom>
           <a:solidFill>
-            <a:srgbClr val="1A2332"/>
+            <a:srgbClr val="1A2026"/>
           </a:solidFill>
           <a:ln/>
         </p:spPr>
@@ -11879,7 +11879,7 @@
     <p:bg>
       <p:bgPr>
         <a:solidFill>
-          <a:srgbClr val="0F1419"/>
+          <a:srgbClr val="0F1214"/>
         </a:solidFill>
       </p:bgPr>
     </p:bg>
@@ -11924,7 +11924,7 @@
             <a:r>
               <a:rPr lang="en-US" sz="2000" b="1" dirty="0">
                 <a:solidFill>
-                  <a:srgbClr val="84CC16"/>
+                  <a:srgbClr val="3B968F"/>
                 </a:solidFill>
                 <a:latin typeface="Calibri" pitchFamily="34" charset="0"/>
                 <a:ea typeface="Calibri" pitchFamily="34" charset="-122"/>
@@ -11953,7 +11953,7 @@
             </a:avLst>
           </a:prstGeom>
           <a:solidFill>
-            <a:srgbClr val="1A2332"/>
+            <a:srgbClr val="1A2026"/>
           </a:solidFill>
           <a:ln/>
         </p:spPr>
@@ -12038,7 +12038,7 @@
             </a:avLst>
           </a:prstGeom>
           <a:solidFill>
-            <a:srgbClr val="1A2332"/>
+            <a:srgbClr val="1A2026"/>
           </a:solidFill>
           <a:ln/>
         </p:spPr>
@@ -12123,7 +12123,7 @@
             </a:avLst>
           </a:prstGeom>
           <a:solidFill>
-            <a:srgbClr val="1A2332"/>
+            <a:srgbClr val="1A2026"/>
           </a:solidFill>
           <a:ln/>
         </p:spPr>
@@ -12208,7 +12208,7 @@
             </a:avLst>
           </a:prstGeom>
           <a:solidFill>
-            <a:srgbClr val="1A2332"/>
+            <a:srgbClr val="1A2026"/>
           </a:solidFill>
           <a:ln/>
         </p:spPr>
@@ -12293,7 +12293,7 @@
             </a:avLst>
           </a:prstGeom>
           <a:solidFill>
-            <a:srgbClr val="1A2332"/>
+            <a:srgbClr val="1A2026"/>
           </a:solidFill>
           <a:ln/>
         </p:spPr>
@@ -12375,7 +12375,7 @@
     <p:bg>
       <p:bgPr>
         <a:solidFill>
-          <a:srgbClr val="0D2137"/>
+          <a:srgbClr val="12181D"/>
         </a:solidFill>
       </p:bgPr>
     </p:bg>
@@ -12456,7 +12456,7 @@
             <a:avLst/>
           </a:prstGeom>
           <a:solidFill>
-            <a:srgbClr val="84CC16">
+            <a:srgbClr val="3B968F">
               <a:alpha val="6000"/>
             </a:srgbClr>
           </a:solidFill>
@@ -12478,7 +12478,7 @@
             <a:avLst/>
           </a:prstGeom>
           <a:solidFill>
-            <a:srgbClr val="84CC16"/>
+            <a:srgbClr val="3B968F"/>
           </a:solidFill>
           <a:ln/>
         </p:spPr>
@@ -12510,7 +12510,7 @@
             <a:r>
               <a:rPr lang="en-US" sz="1200" b="1" spc="200" kern="0" dirty="0">
                 <a:solidFill>
-                  <a:srgbClr val="84CC16"/>
+                  <a:srgbClr val="3B968F"/>
                 </a:solidFill>
                 <a:latin typeface="Calibri" pitchFamily="34" charset="0"/>
                 <a:ea typeface="Calibri" pitchFamily="34" charset="-122"/>
@@ -12588,7 +12588,7 @@
             <a:r>
               <a:rPr lang="en-US" sz="1100" dirty="0">
                 <a:solidFill>
-                  <a:srgbClr val="64748B"/>
+                  <a:srgbClr val="5B6672"/>
                 </a:solidFill>
                 <a:latin typeface="Calibri" pitchFamily="34" charset="0"/>
                 <a:ea typeface="Calibri" pitchFamily="34" charset="-122"/>
@@ -12614,7 +12614,7 @@
     <p:bg>
       <p:bgPr>
         <a:solidFill>
-          <a:srgbClr val="0F1419"/>
+          <a:srgbClr val="0F1214"/>
         </a:solidFill>
       </p:bgPr>
     </p:bg>
@@ -12647,7 +12647,7 @@
             <a:avLst/>
           </a:prstGeom>
           <a:solidFill>
-            <a:srgbClr val="84CC16">
+            <a:srgbClr val="3B968F">
               <a:alpha val="12000"/>
             </a:srgbClr>
           </a:solidFill>
@@ -12705,7 +12705,7 @@
             <a:r>
               <a:rPr lang="en-US" sz="2000" b="1" dirty="0">
                 <a:solidFill>
-                  <a:srgbClr val="84CC16"/>
+                  <a:srgbClr val="3B968F"/>
                 </a:solidFill>
                 <a:latin typeface="Calibri" pitchFamily="34" charset="0"/>
                 <a:ea typeface="Calibri" pitchFamily="34" charset="-122"/>
@@ -12829,7 +12829,7 @@
             <a:r>
               <a:rPr lang="en-US" sz="900" dirty="0">
                 <a:solidFill>
-                  <a:srgbClr val="64748B"/>
+                  <a:srgbClr val="5B6672"/>
                 </a:solidFill>
                 <a:latin typeface="Calibri" pitchFamily="34" charset="0"/>
                 <a:ea typeface="Calibri" pitchFamily="34" charset="-122"/>
@@ -12855,7 +12855,7 @@
     <p:bg>
       <p:bgPr>
         <a:solidFill>
-          <a:srgbClr val="0F1419"/>
+          <a:srgbClr val="0F1214"/>
         </a:solidFill>
       </p:bgPr>
     </p:bg>
@@ -12900,7 +12900,7 @@
             <a:r>
               <a:rPr lang="en-US" sz="2000" b="1" dirty="0">
                 <a:solidFill>
-                  <a:srgbClr val="84CC16"/>
+                  <a:srgbClr val="3B968F"/>
                 </a:solidFill>
                 <a:latin typeface="Calibri" pitchFamily="34" charset="0"/>
                 <a:ea typeface="Calibri" pitchFamily="34" charset="-122"/>
@@ -12993,7 +12993,7 @@
             </a:avLst>
           </a:prstGeom>
           <a:solidFill>
-            <a:srgbClr val="1A2332"/>
+            <a:srgbClr val="1A2026"/>
           </a:solidFill>
           <a:ln/>
         </p:spPr>
@@ -13078,7 +13078,7 @@
             </a:avLst>
           </a:prstGeom>
           <a:solidFill>
-            <a:srgbClr val="1A2332"/>
+            <a:srgbClr val="1A2026"/>
           </a:solidFill>
           <a:ln/>
         </p:spPr>
@@ -13160,7 +13160,7 @@
     <p:bg>
       <p:bgPr>
         <a:solidFill>
-          <a:srgbClr val="0F1419"/>
+          <a:srgbClr val="0F1214"/>
         </a:solidFill>
       </p:bgPr>
     </p:bg>
@@ -13205,7 +13205,7 @@
             <a:r>
               <a:rPr lang="en-US" sz="2000" b="1" dirty="0">
                 <a:solidFill>
-                  <a:srgbClr val="84CC16"/>
+                  <a:srgbClr val="3B968F"/>
                 </a:solidFill>
                 <a:latin typeface="Calibri" pitchFamily="34" charset="0"/>
                 <a:ea typeface="Calibri" pitchFamily="34" charset="-122"/>
@@ -13234,7 +13234,7 @@
             </a:avLst>
           </a:prstGeom>
           <a:solidFill>
-            <a:srgbClr val="1A2332"/>
+            <a:srgbClr val="1A2026"/>
           </a:solidFill>
           <a:ln/>
         </p:spPr>
@@ -13319,7 +13319,7 @@
             </a:avLst>
           </a:prstGeom>
           <a:solidFill>
-            <a:srgbClr val="1A2332"/>
+            <a:srgbClr val="1A2026"/>
           </a:solidFill>
           <a:ln/>
         </p:spPr>
@@ -13414,7 +13414,7 @@
             <a:r>
               <a:rPr lang="en-US" sz="900" dirty="0">
                 <a:solidFill>
-                  <a:srgbClr val="94A3B8"/>
+                  <a:srgbClr val="8994A0"/>
                 </a:solidFill>
                 <a:latin typeface="Calibri" pitchFamily="34" charset="0"/>
                 <a:ea typeface="Calibri" pitchFamily="34" charset="-122"/>
@@ -13443,7 +13443,7 @@
             </a:avLst>
           </a:prstGeom>
           <a:solidFill>
-            <a:srgbClr val="1A2332"/>
+            <a:srgbClr val="1A2026"/>
           </a:solidFill>
           <a:ln/>
         </p:spPr>
@@ -13538,7 +13538,7 @@
             <a:r>
               <a:rPr lang="en-US" sz="900" dirty="0">
                 <a:solidFill>
-                  <a:srgbClr val="94A3B8"/>
+                  <a:srgbClr val="8994A0"/>
                 </a:solidFill>
                 <a:latin typeface="Calibri" pitchFamily="34" charset="0"/>
                 <a:ea typeface="Calibri" pitchFamily="34" charset="-122"/>
@@ -13564,7 +13564,7 @@
     <p:bg>
       <p:bgPr>
         <a:solidFill>
-          <a:srgbClr val="0F1419"/>
+          <a:srgbClr val="0F1214"/>
         </a:solidFill>
       </p:bgPr>
     </p:bg>
@@ -13597,7 +13597,7 @@
             <a:avLst/>
           </a:prstGeom>
           <a:solidFill>
-            <a:srgbClr val="84CC16">
+            <a:srgbClr val="3B968F">
               <a:alpha val="12000"/>
             </a:srgbClr>
           </a:solidFill>
@@ -13655,7 +13655,7 @@
             <a:r>
               <a:rPr lang="en-US" sz="2000" b="1" dirty="0">
                 <a:solidFill>
-                  <a:srgbClr val="84CC16"/>
+                  <a:srgbClr val="3B968F"/>
                 </a:solidFill>
                 <a:latin typeface="Calibri" pitchFamily="34" charset="0"/>
                 <a:ea typeface="Calibri" pitchFamily="34" charset="-122"/>
@@ -13779,7 +13779,7 @@
             <a:r>
               <a:rPr lang="en-US" sz="900" dirty="0">
                 <a:solidFill>
-                  <a:srgbClr val="64748B"/>
+                  <a:srgbClr val="5B6672"/>
                 </a:solidFill>
                 <a:latin typeface="Calibri" pitchFamily="34" charset="0"/>
                 <a:ea typeface="Calibri" pitchFamily="34" charset="-122"/>
@@ -13805,7 +13805,7 @@
     <p:bg>
       <p:bgPr>
         <a:solidFill>
-          <a:srgbClr val="1A2332"/>
+          <a:srgbClr val="1A2026"/>
         </a:solidFill>
       </p:bgPr>
     </p:bg>
@@ -13874,7 +13874,7 @@
             <a:r>
               <a:rPr lang="en-US" sz="1200" b="1" spc="300" kern="0" dirty="0">
                 <a:solidFill>
-                  <a:srgbClr val="F59E0B"/>
+                  <a:srgbClr val="5BC1B8"/>
                 </a:solidFill>
                 <a:latin typeface="Calibri" pitchFamily="34" charset="0"/>
                 <a:ea typeface="Calibri" pitchFamily="34" charset="-122"/>
@@ -13942,7 +13942,7 @@
             </a:avLst>
           </a:prstGeom>
           <a:solidFill>
-            <a:srgbClr val="0F1419"/>
+            <a:srgbClr val="0F1214"/>
           </a:solidFill>
           <a:ln/>
         </p:spPr>
@@ -13964,7 +13964,7 @@
             </a:avLst>
           </a:prstGeom>
           <a:solidFill>
-            <a:srgbClr val="84CC16"/>
+            <a:srgbClr val="3B968F"/>
           </a:solidFill>
           <a:ln/>
         </p:spPr>
@@ -13978,7 +13978,7 @@
             <a:r>
               <a:rPr lang="en-US" sz="1500" b="1" dirty="0">
                 <a:solidFill>
-                  <a:srgbClr val="0F1419"/>
+                  <a:srgbClr val="0F1214"/>
                 </a:solidFill>
                 <a:latin typeface="Calibri" pitchFamily="34" charset="0"/>
                 <a:ea typeface="Calibri" pitchFamily="34" charset="-122"/>
@@ -14046,7 +14046,7 @@
             </a:avLst>
           </a:prstGeom>
           <a:solidFill>
-            <a:srgbClr val="0F1419"/>
+            <a:srgbClr val="0F1214"/>
           </a:solidFill>
           <a:ln/>
         </p:spPr>
@@ -14068,7 +14068,7 @@
             </a:avLst>
           </a:prstGeom>
           <a:solidFill>
-            <a:srgbClr val="84CC16"/>
+            <a:srgbClr val="3B968F"/>
           </a:solidFill>
           <a:ln/>
         </p:spPr>
@@ -14082,7 +14082,7 @@
             <a:r>
               <a:rPr lang="en-US" sz="1500" b="1" dirty="0">
                 <a:solidFill>
-                  <a:srgbClr val="0F1419"/>
+                  <a:srgbClr val="0F1214"/>
                 </a:solidFill>
                 <a:latin typeface="Calibri" pitchFamily="34" charset="0"/>
                 <a:ea typeface="Calibri" pitchFamily="34" charset="-122"/>
@@ -14150,7 +14150,7 @@
             </a:avLst>
           </a:prstGeom>
           <a:solidFill>
-            <a:srgbClr val="0F1419"/>
+            <a:srgbClr val="0F1214"/>
           </a:solidFill>
           <a:ln/>
         </p:spPr>
@@ -14172,7 +14172,7 @@
             </a:avLst>
           </a:prstGeom>
           <a:solidFill>
-            <a:srgbClr val="84CC16"/>
+            <a:srgbClr val="3B968F"/>
           </a:solidFill>
           <a:ln/>
         </p:spPr>
@@ -14186,7 +14186,7 @@
             <a:r>
               <a:rPr lang="en-US" sz="1500" b="1" dirty="0">
                 <a:solidFill>
-                  <a:srgbClr val="0F1419"/>
+                  <a:srgbClr val="0F1214"/>
                 </a:solidFill>
                 <a:latin typeface="Calibri" pitchFamily="34" charset="0"/>
                 <a:ea typeface="Calibri" pitchFamily="34" charset="-122"/>
@@ -14254,7 +14254,7 @@
             </a:avLst>
           </a:prstGeom>
           <a:solidFill>
-            <a:srgbClr val="0F1419"/>
+            <a:srgbClr val="0F1214"/>
           </a:solidFill>
           <a:ln/>
         </p:spPr>
@@ -14276,7 +14276,7 @@
             </a:avLst>
           </a:prstGeom>
           <a:solidFill>
-            <a:srgbClr val="84CC16"/>
+            <a:srgbClr val="3B968F"/>
           </a:solidFill>
           <a:ln/>
         </p:spPr>
@@ -14290,7 +14290,7 @@
             <a:r>
               <a:rPr lang="en-US" sz="1500" b="1" dirty="0">
                 <a:solidFill>
-                  <a:srgbClr val="0F1419"/>
+                  <a:srgbClr val="0F1214"/>
                 </a:solidFill>
                 <a:latin typeface="Calibri" pitchFamily="34" charset="0"/>
                 <a:ea typeface="Calibri" pitchFamily="34" charset="-122"/>
@@ -14358,7 +14358,7 @@
             </a:avLst>
           </a:prstGeom>
           <a:solidFill>
-            <a:srgbClr val="0F1419"/>
+            <a:srgbClr val="0F1214"/>
           </a:solidFill>
           <a:ln/>
         </p:spPr>
@@ -14380,7 +14380,7 @@
             </a:avLst>
           </a:prstGeom>
           <a:solidFill>
-            <a:srgbClr val="84CC16"/>
+            <a:srgbClr val="3B968F"/>
           </a:solidFill>
           <a:ln/>
         </p:spPr>
@@ -14394,7 +14394,7 @@
             <a:r>
               <a:rPr lang="en-US" sz="1500" b="1" dirty="0">
                 <a:solidFill>
-                  <a:srgbClr val="0F1419"/>
+                  <a:srgbClr val="0F1214"/>
                 </a:solidFill>
                 <a:latin typeface="Calibri" pitchFamily="34" charset="0"/>
                 <a:ea typeface="Calibri" pitchFamily="34" charset="-122"/>
@@ -14459,7 +14459,7 @@
     <p:bg>
       <p:bgPr>
         <a:solidFill>
-          <a:srgbClr val="0F1419"/>
+          <a:srgbClr val="0F1214"/>
         </a:solidFill>
       </p:bgPr>
     </p:bg>
@@ -14494,7 +14494,7 @@
             </a:avLst>
           </a:prstGeom>
           <a:solidFill>
-            <a:srgbClr val="2D1B1B"/>
+            <a:srgbClr val="2A1414"/>
           </a:solidFill>
           <a:ln/>
         </p:spPr>
@@ -14514,7 +14514,7 @@
             <a:avLst/>
           </a:prstGeom>
           <a:solidFill>
-            <a:srgbClr val="EF4444"/>
+            <a:srgbClr val="DC2626"/>
           </a:solidFill>
           <a:ln/>
         </p:spPr>
@@ -14570,7 +14570,7 @@
             <a:r>
               <a:rPr lang="en-US" sz="1200" b="1" spc="300" kern="0" dirty="0">
                 <a:solidFill>
-                  <a:srgbClr val="EF4444"/>
+                  <a:srgbClr val="DC2626"/>
                 </a:solidFill>
                 <a:latin typeface="Calibri" pitchFamily="34" charset="0"/>
                 <a:ea typeface="Calibri" pitchFamily="34" charset="-122"/>
@@ -14681,7 +14681,7 @@
     <p:bg>
       <p:bgPr>
         <a:solidFill>
-          <a:srgbClr val="0D2137"/>
+          <a:srgbClr val="12181D"/>
         </a:solidFill>
       </p:bgPr>
     </p:bg>
@@ -14762,7 +14762,7 @@
             <a:avLst/>
           </a:prstGeom>
           <a:solidFill>
-            <a:srgbClr val="84CC16">
+            <a:srgbClr val="3B968F">
               <a:alpha val="6000"/>
             </a:srgbClr>
           </a:solidFill>
@@ -14784,7 +14784,7 @@
             <a:avLst/>
           </a:prstGeom>
           <a:solidFill>
-            <a:srgbClr val="84CC16"/>
+            <a:srgbClr val="3B968F"/>
           </a:solidFill>
           <a:ln/>
         </p:spPr>
@@ -14816,7 +14816,7 @@
             <a:r>
               <a:rPr lang="en-US" sz="1200" b="1" spc="200" kern="0" dirty="0">
                 <a:solidFill>
-                  <a:srgbClr val="84CC16"/>
+                  <a:srgbClr val="3B968F"/>
                 </a:solidFill>
                 <a:latin typeface="Calibri" pitchFamily="34" charset="0"/>
                 <a:ea typeface="Calibri" pitchFamily="34" charset="-122"/>
@@ -14894,7 +14894,7 @@
             <a:r>
               <a:rPr lang="en-US" sz="1100" dirty="0">
                 <a:solidFill>
-                  <a:srgbClr val="64748B"/>
+                  <a:srgbClr val="5B6672"/>
                 </a:solidFill>
                 <a:latin typeface="Calibri" pitchFamily="34" charset="0"/>
                 <a:ea typeface="Calibri" pitchFamily="34" charset="-122"/>
@@ -14920,7 +14920,7 @@
     <p:bg>
       <p:bgPr>
         <a:solidFill>
-          <a:srgbClr val="0F1419"/>
+          <a:srgbClr val="0F1214"/>
         </a:solidFill>
       </p:bgPr>
     </p:bg>
@@ -14953,7 +14953,7 @@
             <a:avLst/>
           </a:prstGeom>
           <a:solidFill>
-            <a:srgbClr val="84CC16">
+            <a:srgbClr val="3B968F">
               <a:alpha val="12000"/>
             </a:srgbClr>
           </a:solidFill>
@@ -15054,7 +15054,7 @@
             <a:r>
               <a:rPr lang="en-US" sz="900" dirty="0">
                 <a:solidFill>
-                  <a:srgbClr val="64748B"/>
+                  <a:srgbClr val="5B6672"/>
                 </a:solidFill>
                 <a:latin typeface="Calibri" pitchFamily="34" charset="0"/>
                 <a:ea typeface="Calibri" pitchFamily="34" charset="-122"/>
@@ -15080,7 +15080,7 @@
     <p:bg>
       <p:bgPr>
         <a:solidFill>
-          <a:srgbClr val="0F1419"/>
+          <a:srgbClr val="0F1214"/>
         </a:solidFill>
       </p:bgPr>
     </p:bg>
@@ -15125,7 +15125,7 @@
             <a:r>
               <a:rPr lang="en-US" sz="2000" b="1" dirty="0">
                 <a:solidFill>
-                  <a:srgbClr val="84CC16"/>
+                  <a:srgbClr val="3B968F"/>
                 </a:solidFill>
                 <a:latin typeface="Calibri" pitchFamily="34" charset="0"/>
                 <a:ea typeface="Calibri" pitchFamily="34" charset="-122"/>
@@ -15239,7 +15239,7 @@
             </a:avLst>
           </a:prstGeom>
           <a:solidFill>
-            <a:srgbClr val="1A2332"/>
+            <a:srgbClr val="1A2026"/>
           </a:solidFill>
           <a:ln/>
         </p:spPr>
@@ -15324,7 +15324,7 @@
             </a:avLst>
           </a:prstGeom>
           <a:solidFill>
-            <a:srgbClr val="1A2332"/>
+            <a:srgbClr val="1A2026"/>
           </a:solidFill>
           <a:ln/>
         </p:spPr>
@@ -15409,7 +15409,7 @@
             </a:avLst>
           </a:prstGeom>
           <a:solidFill>
-            <a:srgbClr val="1A2332"/>
+            <a:srgbClr val="1A2026"/>
           </a:solidFill>
           <a:ln/>
         </p:spPr>
@@ -15491,7 +15491,7 @@
     <p:bg>
       <p:bgPr>
         <a:solidFill>
-          <a:srgbClr val="0F1419"/>
+          <a:srgbClr val="0F1214"/>
         </a:solidFill>
       </p:bgPr>
     </p:bg>
@@ -15536,7 +15536,7 @@
             <a:r>
               <a:rPr lang="en-US" sz="2000" b="1" dirty="0">
                 <a:solidFill>
-                  <a:srgbClr val="84CC16"/>
+                  <a:srgbClr val="3B968F"/>
                 </a:solidFill>
                 <a:latin typeface="Calibri" pitchFamily="34" charset="0"/>
                 <a:ea typeface="Calibri" pitchFamily="34" charset="-122"/>
@@ -15565,7 +15565,7 @@
             </a:avLst>
           </a:prstGeom>
           <a:solidFill>
-            <a:srgbClr val="1A2332"/>
+            <a:srgbClr val="1A2026"/>
           </a:solidFill>
           <a:ln/>
         </p:spPr>
@@ -15660,7 +15660,7 @@
             <a:r>
               <a:rPr lang="en-US" sz="900" dirty="0">
                 <a:solidFill>
-                  <a:srgbClr val="94A3B8"/>
+                  <a:srgbClr val="8994A0"/>
                 </a:solidFill>
                 <a:latin typeface="Calibri" pitchFamily="34" charset="0"/>
                 <a:ea typeface="Calibri" pitchFamily="34" charset="-122"/>
@@ -15689,7 +15689,7 @@
             </a:avLst>
           </a:prstGeom>
           <a:solidFill>
-            <a:srgbClr val="1A2332"/>
+            <a:srgbClr val="1A2026"/>
           </a:solidFill>
           <a:ln/>
         </p:spPr>
@@ -15774,7 +15774,7 @@
             </a:avLst>
           </a:prstGeom>
           <a:solidFill>
-            <a:srgbClr val="1A2332"/>
+            <a:srgbClr val="1A2026"/>
           </a:solidFill>
           <a:ln/>
         </p:spPr>
@@ -15859,7 +15859,7 @@
             </a:avLst>
           </a:prstGeom>
           <a:solidFill>
-            <a:srgbClr val="1A2332"/>
+            <a:srgbClr val="1A2026"/>
           </a:solidFill>
           <a:ln/>
         </p:spPr>
@@ -15944,7 +15944,7 @@
             </a:avLst>
           </a:prstGeom>
           <a:solidFill>
-            <a:srgbClr val="1A2332"/>
+            <a:srgbClr val="1A2026"/>
           </a:solidFill>
           <a:ln/>
         </p:spPr>
@@ -16029,7 +16029,7 @@
             </a:avLst>
           </a:prstGeom>
           <a:solidFill>
-            <a:srgbClr val="1A2332"/>
+            <a:srgbClr val="1A2026"/>
           </a:solidFill>
           <a:ln/>
         </p:spPr>
@@ -16124,7 +16124,7 @@
             <a:r>
               <a:rPr lang="en-US" sz="900" dirty="0">
                 <a:solidFill>
-                  <a:srgbClr val="94A3B8"/>
+                  <a:srgbClr val="8994A0"/>
                 </a:solidFill>
                 <a:latin typeface="Calibri" pitchFamily="34" charset="0"/>
                 <a:ea typeface="Calibri" pitchFamily="34" charset="-122"/>
@@ -16150,7 +16150,7 @@
     <p:bg>
       <p:bgPr>
         <a:solidFill>
-          <a:srgbClr val="0F1419"/>
+          <a:srgbClr val="0F1214"/>
         </a:solidFill>
       </p:bgPr>
     </p:bg>
@@ -16183,7 +16183,7 @@
             <a:avLst/>
           </a:prstGeom>
           <a:solidFill>
-            <a:srgbClr val="84CC16">
+            <a:srgbClr val="3B968F">
               <a:alpha val="12000"/>
             </a:srgbClr>
           </a:solidFill>
@@ -16305,7 +16305,7 @@
             <a:r>
               <a:rPr lang="en-US" sz="900" dirty="0">
                 <a:solidFill>
-                  <a:srgbClr val="64748B"/>
+                  <a:srgbClr val="5B6672"/>
                 </a:solidFill>
                 <a:latin typeface="Calibri" pitchFamily="34" charset="0"/>
                 <a:ea typeface="Calibri" pitchFamily="34" charset="-122"/>
@@ -16331,7 +16331,7 @@
     <p:bg>
       <p:bgPr>
         <a:solidFill>
-          <a:srgbClr val="0F1419"/>
+          <a:srgbClr val="0F1214"/>
         </a:solidFill>
       </p:bgPr>
     </p:bg>
@@ -16364,7 +16364,7 @@
             <a:avLst/>
           </a:prstGeom>
           <a:solidFill>
-            <a:srgbClr val="84CC16">
+            <a:srgbClr val="3B968F">
               <a:alpha val="12000"/>
             </a:srgbClr>
           </a:solidFill>
@@ -16422,7 +16422,7 @@
             <a:r>
               <a:rPr lang="en-US" sz="2000" b="1" dirty="0">
                 <a:solidFill>
-                  <a:srgbClr val="84CC16"/>
+                  <a:srgbClr val="3B968F"/>
                 </a:solidFill>
                 <a:latin typeface="Calibri" pitchFamily="34" charset="0"/>
                 <a:ea typeface="Calibri" pitchFamily="34" charset="-122"/>
@@ -16525,7 +16525,7 @@
             <a:r>
               <a:rPr lang="en-US" sz="900" dirty="0">
                 <a:solidFill>
-                  <a:srgbClr val="64748B"/>
+                  <a:srgbClr val="5B6672"/>
                 </a:solidFill>
                 <a:latin typeface="Calibri" pitchFamily="34" charset="0"/>
                 <a:ea typeface="Calibri" pitchFamily="34" charset="-122"/>
@@ -16551,7 +16551,7 @@
     <p:bg>
       <p:bgPr>
         <a:solidFill>
-          <a:srgbClr val="0F1419"/>
+          <a:srgbClr val="0F1214"/>
         </a:solidFill>
       </p:bgPr>
     </p:bg>
@@ -16596,7 +16596,7 @@
             <a:r>
               <a:rPr lang="en-US" sz="2000" b="1" dirty="0">
                 <a:solidFill>
-                  <a:srgbClr val="84CC16"/>
+                  <a:srgbClr val="3B968F"/>
                 </a:solidFill>
                 <a:latin typeface="Calibri" pitchFamily="34" charset="0"/>
                 <a:ea typeface="Calibri" pitchFamily="34" charset="-122"/>
@@ -16689,7 +16689,7 @@
             </a:avLst>
           </a:prstGeom>
           <a:solidFill>
-            <a:srgbClr val="1A2332"/>
+            <a:srgbClr val="1A2026"/>
           </a:solidFill>
           <a:ln/>
         </p:spPr>
@@ -16774,7 +16774,7 @@
             </a:avLst>
           </a:prstGeom>
           <a:solidFill>
-            <a:srgbClr val="1A2332"/>
+            <a:srgbClr val="1A2026"/>
           </a:solidFill>
           <a:ln/>
         </p:spPr>
@@ -16856,7 +16856,7 @@
     <p:bg>
       <p:bgPr>
         <a:solidFill>
-          <a:srgbClr val="0F1419"/>
+          <a:srgbClr val="0F1214"/>
         </a:solidFill>
       </p:bgPr>
     </p:bg>
@@ -16889,7 +16889,7 @@
             <a:avLst/>
           </a:prstGeom>
           <a:solidFill>
-            <a:srgbClr val="84CC16">
+            <a:srgbClr val="3B968F">
               <a:alpha val="12000"/>
             </a:srgbClr>
           </a:solidFill>
@@ -16947,7 +16947,7 @@
             <a:r>
               <a:rPr lang="en-US" sz="2000" b="1" dirty="0">
                 <a:solidFill>
-                  <a:srgbClr val="84CC16"/>
+                  <a:srgbClr val="3B968F"/>
                 </a:solidFill>
                 <a:latin typeface="Calibri" pitchFamily="34" charset="0"/>
                 <a:ea typeface="Calibri" pitchFamily="34" charset="-122"/>
@@ -17029,7 +17029,7 @@
             <a:r>
               <a:rPr lang="en-US" sz="900" dirty="0">
                 <a:solidFill>
-                  <a:srgbClr val="64748B"/>
+                  <a:srgbClr val="5B6672"/>
                 </a:solidFill>
                 <a:latin typeface="Calibri" pitchFamily="34" charset="0"/>
                 <a:ea typeface="Calibri" pitchFamily="34" charset="-122"/>
@@ -17055,7 +17055,7 @@
     <p:bg>
       <p:bgPr>
         <a:solidFill>
-          <a:srgbClr val="1A2332"/>
+          <a:srgbClr val="1A2026"/>
         </a:solidFill>
       </p:bgPr>
     </p:bg>
@@ -17124,7 +17124,7 @@
             <a:r>
               <a:rPr lang="en-US" sz="1200" b="1" spc="300" kern="0" dirty="0">
                 <a:solidFill>
-                  <a:srgbClr val="F59E0B"/>
+                  <a:srgbClr val="5BC1B8"/>
                 </a:solidFill>
                 <a:latin typeface="Calibri" pitchFamily="34" charset="0"/>
                 <a:ea typeface="Calibri" pitchFamily="34" charset="-122"/>
@@ -17192,7 +17192,7 @@
             </a:avLst>
           </a:prstGeom>
           <a:solidFill>
-            <a:srgbClr val="0F1419"/>
+            <a:srgbClr val="0F1214"/>
           </a:solidFill>
           <a:ln/>
         </p:spPr>
@@ -17214,7 +17214,7 @@
             </a:avLst>
           </a:prstGeom>
           <a:solidFill>
-            <a:srgbClr val="84CC16"/>
+            <a:srgbClr val="3B968F"/>
           </a:solidFill>
           <a:ln/>
         </p:spPr>
@@ -17228,7 +17228,7 @@
             <a:r>
               <a:rPr lang="en-US" sz="1500" b="1" dirty="0">
                 <a:solidFill>
-                  <a:srgbClr val="0F1419"/>
+                  <a:srgbClr val="0F1214"/>
                 </a:solidFill>
                 <a:latin typeface="Calibri" pitchFamily="34" charset="0"/>
                 <a:ea typeface="Calibri" pitchFamily="34" charset="-122"/>
@@ -17296,7 +17296,7 @@
             </a:avLst>
           </a:prstGeom>
           <a:solidFill>
-            <a:srgbClr val="0F1419"/>
+            <a:srgbClr val="0F1214"/>
           </a:solidFill>
           <a:ln/>
         </p:spPr>
@@ -17318,7 +17318,7 @@
             </a:avLst>
           </a:prstGeom>
           <a:solidFill>
-            <a:srgbClr val="84CC16"/>
+            <a:srgbClr val="3B968F"/>
           </a:solidFill>
           <a:ln/>
         </p:spPr>
@@ -17332,7 +17332,7 @@
             <a:r>
               <a:rPr lang="en-US" sz="1500" b="1" dirty="0">
                 <a:solidFill>
-                  <a:srgbClr val="0F1419"/>
+                  <a:srgbClr val="0F1214"/>
                 </a:solidFill>
                 <a:latin typeface="Calibri" pitchFamily="34" charset="0"/>
                 <a:ea typeface="Calibri" pitchFamily="34" charset="-122"/>
@@ -17400,7 +17400,7 @@
             </a:avLst>
           </a:prstGeom>
           <a:solidFill>
-            <a:srgbClr val="0F1419"/>
+            <a:srgbClr val="0F1214"/>
           </a:solidFill>
           <a:ln/>
         </p:spPr>
@@ -17422,7 +17422,7 @@
             </a:avLst>
           </a:prstGeom>
           <a:solidFill>
-            <a:srgbClr val="84CC16"/>
+            <a:srgbClr val="3B968F"/>
           </a:solidFill>
           <a:ln/>
         </p:spPr>
@@ -17436,7 +17436,7 @@
             <a:r>
               <a:rPr lang="en-US" sz="1500" b="1" dirty="0">
                 <a:solidFill>
-                  <a:srgbClr val="0F1419"/>
+                  <a:srgbClr val="0F1214"/>
                 </a:solidFill>
                 <a:latin typeface="Calibri" pitchFamily="34" charset="0"/>
                 <a:ea typeface="Calibri" pitchFamily="34" charset="-122"/>
@@ -17504,7 +17504,7 @@
             </a:avLst>
           </a:prstGeom>
           <a:solidFill>
-            <a:srgbClr val="0F1419"/>
+            <a:srgbClr val="0F1214"/>
           </a:solidFill>
           <a:ln/>
         </p:spPr>
@@ -17526,7 +17526,7 @@
             </a:avLst>
           </a:prstGeom>
           <a:solidFill>
-            <a:srgbClr val="84CC16"/>
+            <a:srgbClr val="3B968F"/>
           </a:solidFill>
           <a:ln/>
         </p:spPr>
@@ -17540,7 +17540,7 @@
             <a:r>
               <a:rPr lang="en-US" sz="1500" b="1" dirty="0">
                 <a:solidFill>
-                  <a:srgbClr val="0F1419"/>
+                  <a:srgbClr val="0F1214"/>
                 </a:solidFill>
                 <a:latin typeface="Calibri" pitchFamily="34" charset="0"/>
                 <a:ea typeface="Calibri" pitchFamily="34" charset="-122"/>
@@ -17608,7 +17608,7 @@
             </a:avLst>
           </a:prstGeom>
           <a:solidFill>
-            <a:srgbClr val="0F1419"/>
+            <a:srgbClr val="0F1214"/>
           </a:solidFill>
           <a:ln/>
         </p:spPr>
@@ -17630,7 +17630,7 @@
             </a:avLst>
           </a:prstGeom>
           <a:solidFill>
-            <a:srgbClr val="84CC16"/>
+            <a:srgbClr val="3B968F"/>
           </a:solidFill>
           <a:ln/>
         </p:spPr>
@@ -17644,7 +17644,7 @@
             <a:r>
               <a:rPr lang="en-US" sz="1500" b="1" dirty="0">
                 <a:solidFill>
-                  <a:srgbClr val="0F1419"/>
+                  <a:srgbClr val="0F1214"/>
                 </a:solidFill>
                 <a:latin typeface="Calibri" pitchFamily="34" charset="0"/>
                 <a:ea typeface="Calibri" pitchFamily="34" charset="-122"/>
@@ -17709,7 +17709,7 @@
     <p:bg>
       <p:bgPr>
         <a:solidFill>
-          <a:srgbClr val="0F1419"/>
+          <a:srgbClr val="0F1214"/>
         </a:solidFill>
       </p:bgPr>
     </p:bg>
@@ -17744,7 +17744,7 @@
             </a:avLst>
           </a:prstGeom>
           <a:solidFill>
-            <a:srgbClr val="2D1B1B"/>
+            <a:srgbClr val="2A1414"/>
           </a:solidFill>
           <a:ln/>
         </p:spPr>
@@ -17764,7 +17764,7 @@
             <a:avLst/>
           </a:prstGeom>
           <a:solidFill>
-            <a:srgbClr val="EF4444"/>
+            <a:srgbClr val="DC2626"/>
           </a:solidFill>
           <a:ln/>
         </p:spPr>
@@ -17820,7 +17820,7 @@
             <a:r>
               <a:rPr lang="en-US" sz="1200" b="1" spc="300" kern="0" dirty="0">
                 <a:solidFill>
-                  <a:srgbClr val="EF4444"/>
+                  <a:srgbClr val="DC2626"/>
                 </a:solidFill>
                 <a:latin typeface="Calibri" pitchFamily="34" charset="0"/>
                 <a:ea typeface="Calibri" pitchFamily="34" charset="-122"/>
@@ -17931,7 +17931,7 @@
     <p:bg>
       <p:bgPr>
         <a:solidFill>
-          <a:srgbClr val="0F1419"/>
+          <a:srgbClr val="0F1214"/>
         </a:solidFill>
       </p:bgPr>
     </p:bg>
@@ -17964,7 +17964,7 @@
             <a:avLst/>
           </a:prstGeom>
           <a:solidFill>
-            <a:srgbClr val="84CC16">
+            <a:srgbClr val="3B968F">
               <a:alpha val="6000"/>
             </a:srgbClr>
           </a:solidFill>
@@ -18061,7 +18061,7 @@
             <a:r>
               <a:rPr lang="en-US" sz="1300" dirty="0">
                 <a:solidFill>
-                  <a:srgbClr val="94A3B8"/>
+                  <a:srgbClr val="8994A0"/>
                 </a:solidFill>
                 <a:latin typeface="Calibri" pitchFamily="34" charset="0"/>
                 <a:ea typeface="Calibri" pitchFamily="34" charset="-122"/>
@@ -18088,7 +18088,7 @@
             <a:avLst/>
           </a:prstGeom>
           <a:solidFill>
-            <a:srgbClr val="84CC16"/>
+            <a:srgbClr val="3B968F"/>
           </a:solidFill>
           <a:ln/>
         </p:spPr>
@@ -18120,7 +18120,7 @@
             <a:r>
               <a:rPr lang="en-US" sz="1100" spc="300" kern="0" dirty="0">
                 <a:solidFill>
-                  <a:srgbClr val="64748B"/>
+                  <a:srgbClr val="5B6672"/>
                 </a:solidFill>
                 <a:latin typeface="Calibri" pitchFamily="34" charset="0"/>
                 <a:ea typeface="Calibri" pitchFamily="34" charset="-122"/>
@@ -18159,7 +18159,7 @@
             <a:r>
               <a:rPr lang="en-US" sz="1100" dirty="0">
                 <a:solidFill>
-                  <a:srgbClr val="009E8B"/>
+                  <a:srgbClr val="000000"/>
                 </a:solidFill>
                 <a:latin typeface="Calibri" pitchFamily="34" charset="0"/>
                 <a:ea typeface="Calibri" pitchFamily="34" charset="-122"/>
@@ -18185,7 +18185,7 @@
     <p:bg>
       <p:bgPr>
         <a:solidFill>
-          <a:srgbClr val="0F1419"/>
+          <a:srgbClr val="0F1214"/>
         </a:solidFill>
       </p:bgPr>
     </p:bg>
@@ -18230,7 +18230,7 @@
             <a:r>
               <a:rPr lang="en-US" sz="2000" b="1" dirty="0">
                 <a:solidFill>
-                  <a:srgbClr val="84CC16"/>
+                  <a:srgbClr val="3B968F"/>
                 </a:solidFill>
                 <a:latin typeface="Calibri" pitchFamily="34" charset="0"/>
                 <a:ea typeface="Calibri" pitchFamily="34" charset="-122"/>
@@ -18323,7 +18323,7 @@
             </a:avLst>
           </a:prstGeom>
           <a:solidFill>
-            <a:srgbClr val="1A2332"/>
+            <a:srgbClr val="1A2026"/>
           </a:solidFill>
           <a:ln/>
         </p:spPr>
@@ -18408,7 +18408,7 @@
             </a:avLst>
           </a:prstGeom>
           <a:solidFill>
-            <a:srgbClr val="1A2332"/>
+            <a:srgbClr val="1A2026"/>
           </a:solidFill>
           <a:ln/>
         </p:spPr>
@@ -18490,7 +18490,7 @@
     <p:bg>
       <p:bgPr>
         <a:solidFill>
-          <a:srgbClr val="0F1419"/>
+          <a:srgbClr val="0F1214"/>
         </a:solidFill>
       </p:bgPr>
     </p:bg>
@@ -18535,7 +18535,7 @@
             <a:r>
               <a:rPr lang="en-US" sz="2000" b="1" dirty="0">
                 <a:solidFill>
-                  <a:srgbClr val="84CC16"/>
+                  <a:srgbClr val="3B968F"/>
                 </a:solidFill>
                 <a:latin typeface="Calibri" pitchFamily="34" charset="0"/>
                 <a:ea typeface="Calibri" pitchFamily="34" charset="-122"/>
@@ -18564,7 +18564,7 @@
             </a:avLst>
           </a:prstGeom>
           <a:solidFill>
-            <a:srgbClr val="1A2332"/>
+            <a:srgbClr val="1A2026"/>
           </a:solidFill>
           <a:ln/>
         </p:spPr>
@@ -18659,7 +18659,7 @@
             <a:r>
               <a:rPr lang="en-US" sz="900" dirty="0">
                 <a:solidFill>
-                  <a:srgbClr val="94A3B8"/>
+                  <a:srgbClr val="8994A0"/>
                 </a:solidFill>
                 <a:latin typeface="Calibri" pitchFamily="34" charset="0"/>
                 <a:ea typeface="Calibri" pitchFamily="34" charset="-122"/>
@@ -18688,7 +18688,7 @@
             </a:avLst>
           </a:prstGeom>
           <a:solidFill>
-            <a:srgbClr val="1A2332"/>
+            <a:srgbClr val="1A2026"/>
           </a:solidFill>
           <a:ln/>
         </p:spPr>
@@ -18773,7 +18773,7 @@
             </a:avLst>
           </a:prstGeom>
           <a:solidFill>
-            <a:srgbClr val="1A2332"/>
+            <a:srgbClr val="1A2026"/>
           </a:solidFill>
           <a:ln/>
         </p:spPr>
@@ -18858,7 +18858,7 @@
             </a:avLst>
           </a:prstGeom>
           <a:solidFill>
-            <a:srgbClr val="1A2332"/>
+            <a:srgbClr val="1A2026"/>
           </a:solidFill>
           <a:ln/>
         </p:spPr>
@@ -18943,7 +18943,7 @@
             </a:avLst>
           </a:prstGeom>
           <a:solidFill>
-            <a:srgbClr val="1A2332"/>
+            <a:srgbClr val="1A2026"/>
           </a:solidFill>
           <a:ln/>
         </p:spPr>
@@ -19038,7 +19038,7 @@
             <a:r>
               <a:rPr lang="en-US" sz="900" dirty="0">
                 <a:solidFill>
-                  <a:srgbClr val="94A3B8"/>
+                  <a:srgbClr val="8994A0"/>
                 </a:solidFill>
                 <a:latin typeface="Calibri" pitchFamily="34" charset="0"/>
                 <a:ea typeface="Calibri" pitchFamily="34" charset="-122"/>
@@ -19064,7 +19064,7 @@
     <p:bg>
       <p:bgPr>
         <a:solidFill>
-          <a:srgbClr val="0F1419"/>
+          <a:srgbClr val="0F1214"/>
         </a:solidFill>
       </p:bgPr>
     </p:bg>
@@ -19097,7 +19097,7 @@
             <a:avLst/>
           </a:prstGeom>
           <a:solidFill>
-            <a:srgbClr val="84CC16">
+            <a:srgbClr val="3B968F">
               <a:alpha val="12000"/>
             </a:srgbClr>
           </a:solidFill>
@@ -19155,7 +19155,7 @@
             <a:r>
               <a:rPr lang="en-US" sz="2000" b="1" dirty="0">
                 <a:solidFill>
-                  <a:srgbClr val="84CC16"/>
+                  <a:srgbClr val="3B968F"/>
                 </a:solidFill>
                 <a:latin typeface="Calibri" pitchFamily="34" charset="0"/>
                 <a:ea typeface="Calibri" pitchFamily="34" charset="-122"/>
@@ -19363,7 +19363,7 @@
             <a:r>
               <a:rPr lang="en-US" sz="900" dirty="0">
                 <a:solidFill>
-                  <a:srgbClr val="64748B"/>
+                  <a:srgbClr val="5B6672"/>
                 </a:solidFill>
                 <a:latin typeface="Calibri" pitchFamily="34" charset="0"/>
                 <a:ea typeface="Calibri" pitchFamily="34" charset="-122"/>
@@ -19389,7 +19389,7 @@
     <p:bg>
       <p:bgPr>
         <a:solidFill>
-          <a:srgbClr val="0F1419"/>
+          <a:srgbClr val="0F1214"/>
         </a:solidFill>
       </p:bgPr>
     </p:bg>
@@ -19434,7 +19434,7 @@
             <a:r>
               <a:rPr lang="en-US" sz="2000" b="1" dirty="0">
                 <a:solidFill>
-                  <a:srgbClr val="84CC16"/>
+                  <a:srgbClr val="3B968F"/>
                 </a:solidFill>
                 <a:latin typeface="Calibri" pitchFamily="34" charset="0"/>
                 <a:ea typeface="Calibri" pitchFamily="34" charset="-122"/>
@@ -19527,7 +19527,7 @@
             </a:avLst>
           </a:prstGeom>
           <a:solidFill>
-            <a:srgbClr val="1A2332"/>
+            <a:srgbClr val="1A2026"/>
           </a:solidFill>
           <a:ln/>
         </p:spPr>
@@ -19609,7 +19609,7 @@
     <p:bg>
       <p:bgPr>
         <a:solidFill>
-          <a:srgbClr val="0F1419"/>
+          <a:srgbClr val="0F1214"/>
         </a:solidFill>
       </p:bgPr>
     </p:bg>
@@ -19654,7 +19654,7 @@
             <a:r>
               <a:rPr lang="en-US" sz="2000" b="1" dirty="0">
                 <a:solidFill>
-                  <a:srgbClr val="84CC16"/>
+                  <a:srgbClr val="3B968F"/>
                 </a:solidFill>
                 <a:latin typeface="Calibri" pitchFamily="34" charset="0"/>
                 <a:ea typeface="Calibri" pitchFamily="34" charset="-122"/>
@@ -19683,7 +19683,7 @@
             </a:avLst>
           </a:prstGeom>
           <a:solidFill>
-            <a:srgbClr val="1A2332"/>
+            <a:srgbClr val="1A2026"/>
           </a:solidFill>
           <a:ln/>
         </p:spPr>
@@ -19768,7 +19768,7 @@
             </a:avLst>
           </a:prstGeom>
           <a:solidFill>
-            <a:srgbClr val="1A2332"/>
+            <a:srgbClr val="1A2026"/>
           </a:solidFill>
           <a:ln/>
         </p:spPr>
@@ -19853,7 +19853,7 @@
             </a:avLst>
           </a:prstGeom>
           <a:solidFill>
-            <a:srgbClr val="1A2332"/>
+            <a:srgbClr val="1A2026"/>
           </a:solidFill>
           <a:ln/>
         </p:spPr>
@@ -19948,7 +19948,7 @@
             <a:r>
               <a:rPr lang="en-US" sz="900" dirty="0">
                 <a:solidFill>
-                  <a:srgbClr val="94A3B8"/>
+                  <a:srgbClr val="8994A0"/>
                 </a:solidFill>
                 <a:latin typeface="Calibri" pitchFamily="34" charset="0"/>
                 <a:ea typeface="Calibri" pitchFamily="34" charset="-122"/>
@@ -19977,7 +19977,7 @@
             </a:avLst>
           </a:prstGeom>
           <a:solidFill>
-            <a:srgbClr val="1A2332"/>
+            <a:srgbClr val="1A2026"/>
           </a:solidFill>
           <a:ln/>
         </p:spPr>
